--- a/presentations/14-kids-sound-and-share/14-kids-sound-and-share-lecture.pptx
+++ b/presentations/14-kids-sound-and-share/14-kids-sound-and-share-lecture.pptx
@@ -137,7 +137,7 @@
   <p:extLst>
     <p:ext uri="{521415D9-36F7-43E2-AB2F-B90AF26B5E84}">
       <p14:sectionLst xmlns:p14="http://schemas.microsoft.com/office/powerpoint/2010/main">
-        <p14:section name="Opening" id="{f329c9b2-d451-667d-e6e9-66c7e43bcb64}">
+        <p14:section name="Opening" id="{2712842d-c4be-eb93-f811-10fb6c573407}">
           <p14:sldIdLst>
             <p14:sldId id="256"/>
             <p14:sldId id="257"/>
@@ -145,7 +145,7 @@
             <p14:sldId id="259"/>
           </p14:sldIdLst>
         </p14:section>
-        <p14:section name="Beep!" id="{6065f7c3-e954-20de-8557-b45025513093}">
+        <p14:section name="Beep!" id="{5f3a3ddb-564c-2e08-fe83-aa188d747380}">
           <p14:sldIdLst>
             <p14:sldId id="260"/>
             <p14:sldId id="261"/>
@@ -155,7 +155,7 @@
             <p14:sldId id="265"/>
           </p14:sldIdLst>
         </p14:section>
-        <p14:section name="Notes" id="{59f9a2a3-cfe6-f61e-21bc-62aed9516fee}">
+        <p14:section name="Notes" id="{2f3de243-f366-e4be-5370-a2adc83a0ca4}">
           <p14:sldIdLst>
             <p14:sldId id="266"/>
             <p14:sldId id="267"/>
@@ -165,14 +165,14 @@
             <p14:sldId id="271"/>
           </p14:sldIdLst>
         </p14:section>
-        <p14:section name="Sprites" id="{ef6d590b-fd7f-20a0-4c29-d6e44b8ab5ca}">
+        <p14:section name="Sprites" id="{3cad9aae-7d17-226a-60b9-8890d2d4db62}">
           <p14:sldIdLst>
             <p14:sldId id="272"/>
             <p14:sldId id="273"/>
             <p14:sldId id="274"/>
           </p14:sldIdLst>
         </p14:section>
-        <p14:section name="Under the blocks" id="{90bb0f6b-416a-8b6d-083b-9b4e643a359f}">
+        <p14:section name="Under the blocks" id="{ea1fa185-45a4-cd51-70b6-1f031fa9951c}">
           <p14:sldIdLst>
             <p14:sldId id="275"/>
             <p14:sldId id="276"/>
@@ -180,7 +180,7 @@
             <p14:sldId id="278"/>
           </p14:sldIdLst>
         </p14:section>
-        <p14:section name="Cartridges and sharing" id="{9de5d380-026c-8474-e924-649873717113}">
+        <p14:section name="Cartridges and sharing" id="{0beed73e-c3a1-6f35-72a6-f7e8029d5443}">
           <p14:sldIdLst>
             <p14:sldId id="279"/>
             <p14:sldId id="280"/>
@@ -191,7 +191,7 @@
             <p14:sldId id="285"/>
           </p14:sldIdLst>
         </p14:section>
-        <p14:section name="Closing" id="{629e0b37-899d-2168-dd47-79f3c517ca28}">
+        <p14:section name="Closing" id="{5f3112fe-a4e8-ee57-077d-f3b6617f5e6e}">
           <p14:sldIdLst>
             <p14:sldId id="286"/>
           </p14:sldIdLst>

--- a/presentations/14-kids-sound-and-share/14-kids-sound-and-share-lecture.pptx
+++ b/presentations/14-kids-sound-and-share/14-kids-sound-and-share-lecture.pptx
@@ -137,7 +137,7 @@
   <p:extLst>
     <p:ext uri="{521415D9-36F7-43E2-AB2F-B90AF26B5E84}">
       <p14:sectionLst xmlns:p14="http://schemas.microsoft.com/office/powerpoint/2010/main">
-        <p14:section name="Opening" id="{2712842d-c4be-eb93-f811-10fb6c573407}">
+        <p14:section name="Opening" id="{b8ea9017-174c-54d0-b360-e2195e3ff573}">
           <p14:sldIdLst>
             <p14:sldId id="256"/>
             <p14:sldId id="257"/>
@@ -145,7 +145,7 @@
             <p14:sldId id="259"/>
           </p14:sldIdLst>
         </p14:section>
-        <p14:section name="Beep!" id="{5f3a3ddb-564c-2e08-fe83-aa188d747380}">
+        <p14:section name="Beep!" id="{926db098-3ab9-7e70-14ca-6da09dd253f5}">
           <p14:sldIdLst>
             <p14:sldId id="260"/>
             <p14:sldId id="261"/>
@@ -155,7 +155,7 @@
             <p14:sldId id="265"/>
           </p14:sldIdLst>
         </p14:section>
-        <p14:section name="Notes" id="{2f3de243-f366-e4be-5370-a2adc83a0ca4}">
+        <p14:section name="Notes" id="{78a99734-54e9-af06-0122-0b56eff7a9cd}">
           <p14:sldIdLst>
             <p14:sldId id="266"/>
             <p14:sldId id="267"/>
@@ -165,14 +165,14 @@
             <p14:sldId id="271"/>
           </p14:sldIdLst>
         </p14:section>
-        <p14:section name="Sprites" id="{3cad9aae-7d17-226a-60b9-8890d2d4db62}">
+        <p14:section name="Sprites" id="{eb8bd590-c053-bdc6-7149-8a527fdc769a}">
           <p14:sldIdLst>
             <p14:sldId id="272"/>
             <p14:sldId id="273"/>
             <p14:sldId id="274"/>
           </p14:sldIdLst>
         </p14:section>
-        <p14:section name="Under the blocks" id="{ea1fa185-45a4-cd51-70b6-1f031fa9951c}">
+        <p14:section name="Under the blocks" id="{630ebe6e-5e03-45f0-77c6-e85608fef45d}">
           <p14:sldIdLst>
             <p14:sldId id="275"/>
             <p14:sldId id="276"/>
@@ -180,7 +180,7 @@
             <p14:sldId id="278"/>
           </p14:sldIdLst>
         </p14:section>
-        <p14:section name="Cartridges and sharing" id="{0beed73e-c3a1-6f35-72a6-f7e8029d5443}">
+        <p14:section name="Cartridges and sharing" id="{a2fb18c4-8895-78e1-39ff-6d9a2515980b}">
           <p14:sldIdLst>
             <p14:sldId id="279"/>
             <p14:sldId id="280"/>
@@ -191,7 +191,7 @@
             <p14:sldId id="285"/>
           </p14:sldIdLst>
         </p14:section>
-        <p14:section name="Closing" id="{5f3112fe-a4e8-ee57-077d-f3b6617f5e6e}">
+        <p14:section name="Closing" id="{1376d28b-375f-28cf-fd29-3abbf9e7c2c1}">
           <p14:sldIdLst>
             <p14:sldId id="286"/>
           </p14:sldIdLst>
@@ -7144,7 +7144,7 @@
           </a:ln>
         </p:spPr>
         <p:txBody>
-          <a:bodyPr wrap="square" lIns="0" tIns="127000" rIns="101600" bIns="0" rtlCol="0" anchor="ctr"/>
+          <a:bodyPr wrap="square" lIns="88900" tIns="88900" rIns="88900" bIns="88900" rtlCol="0" anchor="ctr"/>
           <a:lstStyle/>
           <a:p>
             <a:pPr algn="l" indent="0" marL="0">
@@ -7191,7 +7191,7 @@
           </a:ln>
         </p:spPr>
         <p:txBody>
-          <a:bodyPr wrap="square" lIns="0" tIns="127000" rIns="101600" bIns="0" rtlCol="0" anchor="ctr"/>
+          <a:bodyPr wrap="square" lIns="88900" tIns="88900" rIns="88900" bIns="88900" rtlCol="0" anchor="ctr"/>
           <a:lstStyle/>
           <a:p>
             <a:pPr algn="l" indent="0" marL="0">
@@ -7238,7 +7238,7 @@
           </a:ln>
         </p:spPr>
         <p:txBody>
-          <a:bodyPr wrap="square" lIns="0" tIns="127000" rIns="101600" bIns="0" rtlCol="0" anchor="ctr"/>
+          <a:bodyPr wrap="square" lIns="88900" tIns="88900" rIns="88900" bIns="88900" rtlCol="0" anchor="ctr"/>
           <a:lstStyle/>
           <a:p>
             <a:pPr algn="l" indent="0" marL="0">
@@ -7285,7 +7285,7 @@
           </a:ln>
         </p:spPr>
         <p:txBody>
-          <a:bodyPr wrap="square" lIns="0" tIns="127000" rIns="101600" bIns="0" rtlCol="0" anchor="ctr"/>
+          <a:bodyPr wrap="square" lIns="88900" tIns="88900" rIns="88900" bIns="88900" rtlCol="0" anchor="ctr"/>
           <a:lstStyle/>
           <a:p>
             <a:pPr algn="l" indent="0" marL="0">
@@ -7332,7 +7332,7 @@
           </a:ln>
         </p:spPr>
         <p:txBody>
-          <a:bodyPr wrap="square" lIns="0" tIns="127000" rIns="101600" bIns="0" rtlCol="0" anchor="ctr"/>
+          <a:bodyPr wrap="square" lIns="88900" tIns="88900" rIns="88900" bIns="88900" rtlCol="0" anchor="ctr"/>
           <a:lstStyle/>
           <a:p>
             <a:pPr algn="l" indent="0" marL="0">
@@ -7379,7 +7379,7 @@
           </a:ln>
         </p:spPr>
         <p:txBody>
-          <a:bodyPr wrap="square" lIns="0" tIns="127000" rIns="101600" bIns="0" rtlCol="0" anchor="ctr"/>
+          <a:bodyPr wrap="square" lIns="88900" tIns="88900" rIns="88900" bIns="88900" rtlCol="0" anchor="ctr"/>
           <a:lstStyle/>
           <a:p>
             <a:pPr algn="l" indent="0" marL="0">
@@ -7426,7 +7426,7 @@
           </a:ln>
         </p:spPr>
         <p:txBody>
-          <a:bodyPr wrap="square" lIns="0" tIns="127000" rIns="101600" bIns="0" rtlCol="0" anchor="ctr"/>
+          <a:bodyPr wrap="square" lIns="88900" tIns="88900" rIns="88900" bIns="88900" rtlCol="0" anchor="ctr"/>
           <a:lstStyle/>
           <a:p>
             <a:pPr algn="l" indent="0" marL="0">
@@ -7473,7 +7473,7 @@
           </a:ln>
         </p:spPr>
         <p:txBody>
-          <a:bodyPr wrap="square" lIns="0" tIns="127000" rIns="101600" bIns="0" rtlCol="0" anchor="ctr"/>
+          <a:bodyPr wrap="square" lIns="88900" tIns="88900" rIns="88900" bIns="88900" rtlCol="0" anchor="ctr"/>
           <a:lstStyle/>
           <a:p>
             <a:pPr algn="l" indent="0" marL="0">
@@ -18605,7 +18605,7 @@
           </a:ln>
         </p:spPr>
         <p:txBody>
-          <a:bodyPr wrap="square" lIns="0" tIns="127000" rIns="101600" bIns="0" rtlCol="0" anchor="ctr"/>
+          <a:bodyPr wrap="square" lIns="88900" tIns="88900" rIns="88900" bIns="88900" rtlCol="0" anchor="ctr"/>
           <a:lstStyle/>
           <a:p>
             <a:pPr algn="l" indent="0" marL="0">
@@ -19611,7 +19611,7 @@
           </a:ln>
         </p:spPr>
         <p:txBody>
-          <a:bodyPr wrap="square" lIns="0" tIns="127000" rIns="101600" bIns="0" rtlCol="0" anchor="ctr"/>
+          <a:bodyPr wrap="square" lIns="88900" tIns="88900" rIns="88900" bIns="88900" rtlCol="0" anchor="ctr"/>
           <a:lstStyle/>
           <a:p>
             <a:pPr algn="l" indent="0" marL="0">
@@ -19658,7 +19658,7 @@
           </a:ln>
         </p:spPr>
         <p:txBody>
-          <a:bodyPr wrap="square" lIns="0" tIns="127000" rIns="101600" bIns="0" rtlCol="0" anchor="ctr"/>
+          <a:bodyPr wrap="square" lIns="88900" tIns="88900" rIns="88900" bIns="88900" rtlCol="0" anchor="ctr"/>
           <a:lstStyle/>
           <a:p>
             <a:pPr algn="l" indent="0" marL="0">
@@ -19705,7 +19705,7 @@
           </a:ln>
         </p:spPr>
         <p:txBody>
-          <a:bodyPr wrap="square" lIns="0" tIns="127000" rIns="101600" bIns="0" rtlCol="0" anchor="ctr"/>
+          <a:bodyPr wrap="square" lIns="88900" tIns="88900" rIns="88900" bIns="88900" rtlCol="0" anchor="ctr"/>
           <a:lstStyle/>
           <a:p>
             <a:pPr algn="l" indent="0" marL="0">
